--- a/assets/pptx/catalog-663.pptx
+++ b/assets/pptx/catalog-663.pptx
@@ -3294,7 +3294,7 @@
                 <a:ea typeface="Ebrima"/>
                 <a:cs typeface="Ebrima"/>
               </a:rPr>
-              <a:t>ለዘለዓለም ለዘለዓለም ለዘለዓለም ንጉሤ ነው (2x)</a:t>
+              <a:t>ለዘለዓለም ለዘለዓለም ለዘለዓለም ንጉሤ ነው 2x</a:t>
             </a:r>
           </a:p>
         </p:txBody>
@@ -3397,7 +3397,7 @@
                 <a:ea typeface="Ebrima"/>
                 <a:cs typeface="Ebrima"/>
               </a:rPr>
-              <a:t>ሞትና መውጊያውን . (1) . ያስቀራል</a:t>
+              <a:t>ሞትና መውጊያውን . 1 . ያስቀራል</a:t>
             </a:r>
           </a:p>
           <a:p>
@@ -3639,7 +3639,7 @@
                 <a:ea typeface="Ebrima"/>
                 <a:cs typeface="Ebrima"/>
               </a:rPr>
-              <a:t>ለዘለዓለም ለዘለዓለም ለዘለዓለም ንጉሤ ነው (2x)</a:t>
+              <a:t>ለዘለዓለም ለዘለዓለም ለዘለዓለም ንጉሤ ነው 2x</a:t>
             </a:r>
           </a:p>
         </p:txBody>
@@ -3984,7 +3984,7 @@
                 <a:ea typeface="Ebrima"/>
                 <a:cs typeface="Ebrima"/>
               </a:rPr>
-              <a:t>ለዘለዓለም ለዘለዓለም ለዘለዓለም ንጉሤ ነው (2x)</a:t>
+              <a:t>ለዘለዓለም ለዘለዓለም ለዘለዓለም ንጉሤ ነው 2x</a:t>
             </a:r>
           </a:p>
         </p:txBody>
@@ -4329,7 +4329,7 @@
                 <a:ea typeface="Ebrima"/>
                 <a:cs typeface="Ebrima"/>
               </a:rPr>
-              <a:t>ለዘለዓለም ለዘለዓለም ለዘለዓለም ንጉሤ ነው (4x)</a:t>
+              <a:t>ለዘለዓለም ለዘለዓለም ለዘለዓለም ንጉሤ ነው 4x</a:t>
             </a:r>
           </a:p>
         </p:txBody>
@@ -4674,7 +4674,7 @@
                 <a:ea typeface="Ebrima"/>
                 <a:cs typeface="Ebrima"/>
               </a:rPr>
-              <a:t>ለዘለዓለም ለዘለዓለም ለዘለዓለም ንጉሤ ነው (2x)</a:t>
+              <a:t>ለዘለዓለም ለዘለዓለም ለዘለዓለም ንጉሤ ነው 2x</a:t>
             </a:r>
           </a:p>
         </p:txBody>
@@ -5019,7 +5019,7 @@
                 <a:ea typeface="Ebrima"/>
                 <a:cs typeface="Ebrima"/>
               </a:rPr>
-              <a:t>ለዘለዓለም ለዘለዓለም ለዘለዓለም ንጉሤ ነው (2x)</a:t>
+              <a:t>ለዘለዓለም ለዘለዓለም ለዘለዓለም ንጉሤ ነው 2x</a:t>
             </a:r>
           </a:p>
         </p:txBody>
